--- a/발표/RESTful-API-설계.pptx
+++ b/발표/RESTful-API-설계.pptx
@@ -5581,20 +5581,6 @@
           </a:ln>
           <a:effectLst/>
         </p:spPr>
-        <p:style>
-          <a:lnRef idx="1">
-            <a:schemeClr val="accent1"/>
-          </a:lnRef>
-          <a:fillRef idx="3">
-            <a:schemeClr val="accent1"/>
-          </a:fillRef>
-          <a:effectRef idx="2">
-            <a:schemeClr val="accent1"/>
-          </a:effectRef>
-          <a:fontRef idx="minor">
-            <a:schemeClr val="lt1"/>
-          </a:fontRef>
-        </p:style>
         <p:txBody>
           <a:bodyPr rtlCol="0" anchor="t" wrap="square" lIns="180000" rIns="180000" tIns="125999" bIns="125999"/>
           <a:lstStyle/>
@@ -5838,20 +5824,6 @@
           </a:ln>
           <a:effectLst/>
         </p:spPr>
-        <p:style>
-          <a:lnRef idx="1">
-            <a:schemeClr val="accent1"/>
-          </a:lnRef>
-          <a:fillRef idx="3">
-            <a:schemeClr val="accent1"/>
-          </a:fillRef>
-          <a:effectRef idx="2">
-            <a:schemeClr val="accent1"/>
-          </a:effectRef>
-          <a:fontRef idx="minor">
-            <a:schemeClr val="lt1"/>
-          </a:fontRef>
-        </p:style>
         <p:txBody>
           <a:bodyPr rtlCol="0" anchor="t" wrap="square" lIns="180000" rIns="180000" tIns="125999" bIns="125999"/>
           <a:lstStyle/>
@@ -6234,20 +6206,6 @@
           </a:ln>
           <a:effectLst/>
         </p:spPr>
-        <p:style>
-          <a:lnRef idx="1">
-            <a:schemeClr val="accent1"/>
-          </a:lnRef>
-          <a:fillRef idx="3">
-            <a:schemeClr val="accent1"/>
-          </a:fillRef>
-          <a:effectRef idx="2">
-            <a:schemeClr val="accent1"/>
-          </a:effectRef>
-          <a:fontRef idx="minor">
-            <a:schemeClr val="lt1"/>
-          </a:fontRef>
-        </p:style>
         <p:txBody>
           <a:bodyPr rtlCol="0" anchor="t" wrap="square" lIns="180000" rIns="180000" tIns="125999" bIns="125999"/>
           <a:lstStyle/>
@@ -6374,20 +6332,6 @@
           </a:ln>
           <a:effectLst/>
         </p:spPr>
-        <p:style>
-          <a:lnRef idx="1">
-            <a:schemeClr val="accent1"/>
-          </a:lnRef>
-          <a:fillRef idx="3">
-            <a:schemeClr val="accent1"/>
-          </a:fillRef>
-          <a:effectRef idx="2">
-            <a:schemeClr val="accent1"/>
-          </a:effectRef>
-          <a:fontRef idx="minor">
-            <a:schemeClr val="lt1"/>
-          </a:fontRef>
-        </p:style>
         <p:txBody>
           <a:bodyPr rtlCol="0" anchor="t" wrap="square" lIns="180000" rIns="180000" tIns="125999" bIns="125999"/>
           <a:lstStyle/>
@@ -6760,20 +6704,6 @@
           </a:ln>
           <a:effectLst/>
         </p:spPr>
-        <p:style>
-          <a:lnRef idx="1">
-            <a:schemeClr val="accent1"/>
-          </a:lnRef>
-          <a:fillRef idx="3">
-            <a:schemeClr val="accent1"/>
-          </a:fillRef>
-          <a:effectRef idx="2">
-            <a:schemeClr val="accent1"/>
-          </a:effectRef>
-          <a:fontRef idx="minor">
-            <a:schemeClr val="lt1"/>
-          </a:fontRef>
-        </p:style>
         <p:txBody>
           <a:bodyPr rtlCol="0" anchor="t" wrap="square" lIns="180000" rIns="180000" tIns="125999" bIns="125999"/>
           <a:lstStyle/>
@@ -6873,20 +6803,6 @@
           </a:ln>
           <a:effectLst/>
         </p:spPr>
-        <p:style>
-          <a:lnRef idx="1">
-            <a:schemeClr val="accent1"/>
-          </a:lnRef>
-          <a:fillRef idx="3">
-            <a:schemeClr val="accent1"/>
-          </a:fillRef>
-          <a:effectRef idx="2">
-            <a:schemeClr val="accent1"/>
-          </a:effectRef>
-          <a:fontRef idx="minor">
-            <a:schemeClr val="lt1"/>
-          </a:fontRef>
-        </p:style>
         <p:txBody>
           <a:bodyPr rtlCol="0" anchor="t" wrap="square" lIns="180000" rIns="180000" tIns="125999" bIns="125999"/>
           <a:lstStyle/>
@@ -7814,20 +7730,6 @@
           </a:ln>
           <a:effectLst/>
         </p:spPr>
-        <p:style>
-          <a:lnRef idx="1">
-            <a:schemeClr val="accent1"/>
-          </a:lnRef>
-          <a:fillRef idx="3">
-            <a:schemeClr val="accent1"/>
-          </a:fillRef>
-          <a:effectRef idx="2">
-            <a:schemeClr val="accent1"/>
-          </a:effectRef>
-          <a:fontRef idx="minor">
-            <a:schemeClr val="lt1"/>
-          </a:fontRef>
-        </p:style>
         <p:txBody>
           <a:bodyPr rtlCol="0" anchor="t" wrap="square" lIns="180000" rIns="180000" tIns="125999" bIns="125999"/>
           <a:lstStyle/>
@@ -7987,20 +7889,6 @@
           </a:ln>
           <a:effectLst/>
         </p:spPr>
-        <p:style>
-          <a:lnRef idx="1">
-            <a:schemeClr val="accent1"/>
-          </a:lnRef>
-          <a:fillRef idx="3">
-            <a:schemeClr val="accent1"/>
-          </a:fillRef>
-          <a:effectRef idx="2">
-            <a:schemeClr val="accent1"/>
-          </a:effectRef>
-          <a:fontRef idx="minor">
-            <a:schemeClr val="lt1"/>
-          </a:fontRef>
-        </p:style>
         <p:txBody>
           <a:bodyPr rtlCol="0" anchor="t" wrap="square" lIns="180000" rIns="180000" tIns="125999" bIns="125999"/>
           <a:lstStyle/>
@@ -8272,20 +8160,6 @@
           </a:ln>
           <a:effectLst/>
         </p:spPr>
-        <p:style>
-          <a:lnRef idx="1">
-            <a:schemeClr val="accent1"/>
-          </a:lnRef>
-          <a:fillRef idx="3">
-            <a:schemeClr val="accent1"/>
-          </a:fillRef>
-          <a:effectRef idx="2">
-            <a:schemeClr val="accent1"/>
-          </a:effectRef>
-          <a:fontRef idx="minor">
-            <a:schemeClr val="lt1"/>
-          </a:fontRef>
-        </p:style>
         <p:txBody>
           <a:bodyPr rtlCol="0" anchor="t" wrap="square" lIns="180000" rIns="180000" tIns="125999" bIns="125999"/>
           <a:lstStyle/>
@@ -8828,20 +8702,6 @@
           </a:ln>
           <a:effectLst/>
         </p:spPr>
-        <p:style>
-          <a:lnRef idx="1">
-            <a:schemeClr val="accent1"/>
-          </a:lnRef>
-          <a:fillRef idx="3">
-            <a:schemeClr val="accent1"/>
-          </a:fillRef>
-          <a:effectRef idx="2">
-            <a:schemeClr val="accent1"/>
-          </a:effectRef>
-          <a:fontRef idx="minor">
-            <a:schemeClr val="lt1"/>
-          </a:fontRef>
-        </p:style>
         <p:txBody>
           <a:bodyPr rtlCol="0" anchor="t" wrap="square" lIns="180000" rIns="180000" tIns="125999" bIns="125999"/>
           <a:lstStyle/>
@@ -10683,7 +10543,7 @@
       </p:sp>
       <p:pic>
         <p:nvPicPr>
-          <p:cNvPr id="3" name="Picture 2" descr="tmp7n5l604n.png"/>
+          <p:cNvPr id="3" name="Picture 2" descr="tmpbvowrete.png"/>
           <p:cNvPicPr>
             <a:picLocks noChangeAspect="1"/>
           </p:cNvPicPr>
@@ -10707,7 +10567,7 @@
       </p:pic>
       <p:pic>
         <p:nvPicPr>
-          <p:cNvPr id="4" name="Picture 3" descr="tmpd1zblpbn.png"/>
+          <p:cNvPr id="4" name="Picture 3" descr="tmpw6wsg6xr.png"/>
           <p:cNvPicPr>
             <a:picLocks noChangeAspect="1"/>
           </p:cNvPicPr>
@@ -12283,7 +12143,7 @@
       </p:sp>
       <p:pic>
         <p:nvPicPr>
-          <p:cNvPr id="3" name="Picture 2" descr="tmpvb24r2jr.png"/>
+          <p:cNvPr id="3" name="Picture 2" descr="tmpdw2hefx1.png"/>
           <p:cNvPicPr>
             <a:picLocks noChangeAspect="1"/>
           </p:cNvPicPr>
@@ -12307,7 +12167,7 @@
       </p:pic>
       <p:pic>
         <p:nvPicPr>
-          <p:cNvPr id="4" name="Picture 3" descr="tmp99gaybl6.png"/>
+          <p:cNvPr id="4" name="Picture 3" descr="tmpfdcfh6w_.png"/>
           <p:cNvPicPr>
             <a:picLocks noChangeAspect="1"/>
           </p:cNvPicPr>
@@ -12331,7 +12191,7 @@
       </p:pic>
       <p:pic>
         <p:nvPicPr>
-          <p:cNvPr id="5" name="Picture 4" descr="tmp1hyqyeu7.png"/>
+          <p:cNvPr id="5" name="Picture 4" descr="tmpb4tk2_dp.png"/>
           <p:cNvPicPr>
             <a:picLocks noChangeAspect="1"/>
           </p:cNvPicPr>
@@ -15059,20 +14919,6 @@
           </a:ln>
           <a:effectLst/>
         </p:spPr>
-        <p:style>
-          <a:lnRef idx="1">
-            <a:schemeClr val="accent1"/>
-          </a:lnRef>
-          <a:fillRef idx="3">
-            <a:schemeClr val="accent1"/>
-          </a:fillRef>
-          <a:effectRef idx="2">
-            <a:schemeClr val="accent1"/>
-          </a:effectRef>
-          <a:fontRef idx="minor">
-            <a:schemeClr val="lt1"/>
-          </a:fontRef>
-        </p:style>
         <p:txBody>
           <a:bodyPr rtlCol="0" anchor="t" wrap="square" lIns="180000" rIns="180000" tIns="125999" bIns="125999"/>
           <a:lstStyle/>
@@ -16246,20 +16092,6 @@
           </a:ln>
           <a:effectLst/>
         </p:spPr>
-        <p:style>
-          <a:lnRef idx="1">
-            <a:schemeClr val="accent1"/>
-          </a:lnRef>
-          <a:fillRef idx="3">
-            <a:schemeClr val="accent1"/>
-          </a:fillRef>
-          <a:effectRef idx="2">
-            <a:schemeClr val="accent1"/>
-          </a:effectRef>
-          <a:fontRef idx="minor">
-            <a:schemeClr val="lt1"/>
-          </a:fontRef>
-        </p:style>
         <p:txBody>
           <a:bodyPr rtlCol="0" anchor="t" wrap="square" lIns="180000" rIns="180000" tIns="125999" bIns="125999"/>
           <a:lstStyle/>
@@ -16398,20 +16230,6 @@
           </a:ln>
           <a:effectLst/>
         </p:spPr>
-        <p:style>
-          <a:lnRef idx="1">
-            <a:schemeClr val="accent1"/>
-          </a:lnRef>
-          <a:fillRef idx="3">
-            <a:schemeClr val="accent1"/>
-          </a:fillRef>
-          <a:effectRef idx="2">
-            <a:schemeClr val="accent1"/>
-          </a:effectRef>
-          <a:fontRef idx="minor">
-            <a:schemeClr val="lt1"/>
-          </a:fontRef>
-        </p:style>
         <p:txBody>
           <a:bodyPr rtlCol="0" anchor="t" wrap="square" lIns="180000" rIns="180000" tIns="125999" bIns="125999"/>
           <a:lstStyle/>

--- a/발표/RESTful-API-설계.pptx
+++ b/발표/RESTful-API-설계.pptx
@@ -140,13 +140,13 @@
   <p:extLst>
     <p:ext uri="{521415D9-36F7-43E2-AB2F-B90AF26B5E84}">
       <p14:sectionLst xmlns:p14="http://schemas.microsoft.com/office/powerpoint/2010/main">
-        <p14:section name="시작" id="{8617631d-c4b4-a40d-4c7d-6810409250f8}">
+        <p14:section name="시작" id="{9cf6d2b4-02a1-7aa9-497b-916c4bafee57}">
           <p14:sldIdLst>
             <p14:sldId id="256"/>
             <p14:sldId id="257"/>
           </p14:sldIdLst>
         </p14:section>
-        <p14:section name="01 자원 중심 URL" id="{6ae8885f-9bf2-70f7-7a74-9a8dbbdd1e43}">
+        <p14:section name="01 자원 중심 URL" id="{c83d7094-c512-b2ae-76b9-f9365fe8d2ee}">
           <p14:sldIdLst>
             <p14:sldId id="258"/>
             <p14:sldId id="259"/>
@@ -154,7 +154,7 @@
             <p14:sldId id="261"/>
           </p14:sldIdLst>
         </p14:section>
-        <p14:section name="02 HTTP 메서드와 상태 코드" id="{274d9a0b-202a-81ce-25cd-57e2ffb1a20b}">
+        <p14:section name="02 HTTP 메서드와 상태 코드" id="{1af30a5f-4703-f39a-4cb9-b8559c13fbb9}">
           <p14:sldIdLst>
             <p14:sldId id="262"/>
             <p14:sldId id="263"/>
@@ -163,21 +163,21 @@
             <p14:sldId id="266"/>
           </p14:sldIdLst>
         </p14:section>
-        <p14:section name="03 공통 응답과 에러 형식" id="{43b9836d-541e-7df7-d056-6446d29c7ba4}">
+        <p14:section name="03 공통 응답과 에러 형식" id="{b4f6e7bc-3c8a-6296-f532-a0e72ffdd1ed}">
           <p14:sldIdLst>
             <p14:sldId id="267"/>
             <p14:sldId id="268"/>
             <p14:sldId id="269"/>
           </p14:sldIdLst>
         </p14:section>
-        <p14:section name="04 전역 예외 처리와 입력 검증" id="{c5740d42-af7d-9819-969e-34a2010f5117}">
+        <p14:section name="04 전역 예외 처리와 입력 검증" id="{b38902c5-d210-0c5a-239c-af806284a241}">
           <p14:sldIdLst>
             <p14:sldId id="270"/>
             <p14:sldId id="271"/>
             <p14:sldId id="272"/>
           </p14:sldIdLst>
         </p14:section>
-        <p14:section name="05 페이징 · 검색 · 정렬" id="{978b107e-90f1-a0e9-8c6f-e7ceb579654b}">
+        <p14:section name="05 페이징 · 검색 · 정렬" id="{0b8b4337-600d-4ff3-b97b-0e592a1953b1}">
           <p14:sldIdLst>
             <p14:sldId id="273"/>
             <p14:sldId id="274"/>
@@ -186,7 +186,7 @@
             <p14:sldId id="277"/>
           </p14:sldIdLst>
         </p14:section>
-        <p14:section name="06 API 문서 작성" id="{8485fd60-9c81-4bc1-5ef9-567019c40c23}">
+        <p14:section name="06 API 문서 작성" id="{0532d59b-feed-fb00-f953-bad5a3732a45}">
           <p14:sldIdLst>
             <p14:sldId id="278"/>
             <p14:sldId id="279"/>
@@ -196,12 +196,12 @@
             <p14:sldId id="283"/>
           </p14:sldIdLst>
         </p14:section>
-        <p14:section name="정리" id="{b1b512f5-9ce2-4334-eb99-2cd1d48f2a3a}">
+        <p14:section name="정리" id="{03b99600-0936-313a-293f-a8fb32adf846}">
           <p14:sldIdLst>
             <p14:sldId id="284"/>
           </p14:sldIdLst>
         </p14:section>
-        <p14:section name="예비 (질문이 나오면)" id="{37f6b683-5dc0-dc22-a225-85affa551d7b}">
+        <p14:section name="예비 (질문이 나오면)" id="{ed490d6f-6ae3-e70d-8d1b-97689f91c809}">
           <p14:sldIdLst>
             <p14:sldId id="285"/>
             <p14:sldId id="286"/>
@@ -1321,7 +1321,7 @@
           <a:p>
             <a:r>
               <a:rPr lang="en-US" dirty="0"/>
-              <a:t>안녕하세요, 이재웅입니다. 오늘은 REST API를 설계할 때 팀이 정해야 하는 규칙들을, 문법보다 왜 그렇게 정하는지 위주로 이야기하겠습니다. 마지막에는 제 프로젝트 글결의 실제 API 문서와 에러 응답을 보여 드리겠습니다.</a:t>
+              <a:t>안녕하세요, 이재웅입니다. 오늘은 REST API를 설계할 때 팀이 정해야 하는 규칙들을 이야기하겠습니다. 규칙만 외우기보다, 왜 그렇게 정하는지를 같이 보겠습니다. 마지막에는 제 프로젝트 글결의 실제 API 문서와 에러 응답을 보여 드리겠습니다.</a:t>
             </a:r>
             <a:endParaRPr lang="en-US" dirty="0"/>
           </a:p>
@@ -1409,7 +1409,7 @@
           <a:p>
             <a:r>
               <a:rPr lang="en-US" dirty="0"/>
-              <a:t>자주 쓰는 건 이 정도입니다. 생성은 201과 함께 Location 헤더에 새 자원의 주소를, 삭제는 바디 없이 204를 줍니다. 헷갈리는 건 401과 403입니다. 401은 누구인지 모르는 것, 403은 누구인지는 알지만 권한이 없는 것입니다. 409는 중복 가입이나 동시 수정처럼 현재 상태와 충돌할 때 씁니다. 그리고 남의 비공개 글처럼 존재 자체를 숨겨야 할 때는 일부러 403 대신 404를 주기도 합니다.</a:t>
+              <a:t>자주 쓰는 상태 코드는 이 정도입니다. 몇 개만 짚겠습니다. 만들었으면 201과 함께 새 글의 주소를 주고, 지웠으면 바디 없이 204입니다. 가장 헷갈리는 건 401과 403입니다. 401은 누구인지 모를 때, 그러니까 로그인을 안 했거나 만료됐을 때입니다. 403은 누구인지는 알지만 권한이 없을 때입니다. 그리고 남의 비공개 글은 일부러 404를 주기도 합니다. 403을 주면 그 글이 있다는 게 드러나기 때문입니다.</a:t>
             </a:r>
             <a:endParaRPr lang="en-US" dirty="0"/>
           </a:p>
@@ -1497,7 +1497,7 @@
           <a:p>
             <a:r>
               <a:rPr lang="en-US" dirty="0"/>
-              <a:t>자주 보는 안티패턴이 실패를 200으로 보내고 바디에 success false를 담는 방식입니다. APM 같은 모니터링, 로드밸런서, 캐시, 자동 재시도, 프론트엔드의 HTTP 클라이언트는 모두 바디가 아니라 상태 코드를 봅니다. 그래서 장애가 나도 대시보드는 정상으로 보이고, 실패 응답이 캐시되기도 합니다. 실패는 4xx, 5xx로 보내고, 세밀한 구분은 바디의 에러 코드로 합니다. 오른쪽은 예제 서버에 실제로 보낸 요청입니다.</a:t>
+              <a:t>자주 보는 실수가 있습니다. 실패했는데 200을 주고, 바디에 success false를 담는 방식입니다. 문제는 모니터링, 캐시, 자동 재시도 같은 도구들이 바디는 안 보고 상태 코드만 본다는 겁니다. 그래서 장애가 나도 모니터링에는 전부 성공으로 찍힙니다. 실패는 4xx, 5xx로 보내고, 자세한 이유는 바디에 담습니다. 오른쪽은 예제 서버에 없는 글을 요청한 실제 응답입니다.</a:t>
             </a:r>
             <a:endParaRPr lang="en-US" dirty="0"/>
           </a:p>
@@ -1673,7 +1673,7 @@
           <a:p>
             <a:r>
               <a:rPr lang="en-US" dirty="0"/>
-              <a:t>에러는 모든 API가 같은 모양으로 보냅니다. 예제 서버는 RFC 9457 표준인 ProblemDetail에, 팀 에러 코드인 code와 입력값 오류일 때 필드별 errors를 붙였습니다. 프론트엔드는 code로 분기하고 detail은 화면에 보여 주기만 합니다. 문장으로 분기하면 문구 하나 고칠 때 화면이 깨지기 때문입니다. 표준을 따를지 팀 형식을 쓸지는 선택이지만, 하나로 통일하는 게 핵심입니다.</a:t>
+              <a:t>에러는 모든 API가 같은 모양으로 보냅니다. 모양이 제각각이면 프론트엔드가 API마다 에러 처리를 따로 짜야 하기 때문입니다. 예제 서버는 ProblemDetail이라는 표준 형식에, 팀 에러 코드인 code와 틀린 입력 칸을 알려 주는 errors를 더했습니다. 프론트엔드는 code를 보고 분기하고, detail 문장은 화면에 보여 주기만 합니다. 문장으로 분기하면 문구 하나만 고쳐도 화면이 깨지기 때문입니다.</a:t>
             </a:r>
             <a:endParaRPr lang="en-US" dirty="0"/>
           </a:p>
@@ -1761,7 +1761,7 @@
           <a:p>
             <a:r>
               <a:rPr lang="en-US" dirty="0"/>
-              <a:t>예상 못 한 예외가 나도 스택 트레이스나 SQL, 테이블 이름은 응답에 넣지 않습니다. 공격자에게 내부 구조를 알려 주기 때문입니다. 대신 요청마다 traceId를 만들어 응답에는 그 값만, 서버 로그에는 같은 traceId와 전체 스택 트레이스를 남깁니다. 사용자가 문의하면 traceId 하나로 로그를 바로 찾을 수 있습니다.</a:t>
+              <a:t>예상 못 한 에러가 나도 에러 내용을 그대로 응답에 넣으면 안 됩니다. SQL이나 테이블 이름이 보이면 공격자에게 내부를 알려 주는 셈이니까요. 대신 요청마다 traceId라는 번호를 붙여서, 응답에는 이 번호만 담고 로그에는 같은 번호로 전체 내용을 남깁니다. 사용자가 이 번호로 문의하면 로그에서 바로 찾을 수 있습니다. 이 화면은 예시입니다.</a:t>
             </a:r>
             <a:endParaRPr lang="en-US" dirty="0"/>
           </a:p>
@@ -1937,7 +1937,7 @@
           <a:p>
             <a:r>
               <a:rPr lang="en-US" dirty="0"/>
-              <a:t>이 형식을 모든 API가 지키게 하는 게 전역 예외 처리입니다. 검증은 두 층으로 나눕니다. 빈 제목처럼 값만 보면 아는 건 DTO에 규칙을 적어 컨트롤러 메서드에 들어오기 전에 걸러지고, 없는 글이나 중복 제목처럼 DB를 봐야 아는 건 서비스에서 예외를 던집니다. 컨트롤러에는 try-catch가 없고, 예외는 호출한 쪽으로 올라가 @RestControllerAdvice 한 곳에서 상태 코드와 에러 형식으로 바뀝니다. 다만 Spring Security 필터에서 난 인증 오류는 컨트롤러 밖이라 여기서 잡히지 않으니 따로 처리합니다.</a:t>
+              <a:t>모든 API가 같은 에러 모양을 지키게 하려면, 에러 처리를 한 곳에 모으면 됩니다. 먼저 검증을 둘로 나눕니다. 제목이 비었는지처럼 값만 보면 아는 건 DTO에 규칙을 적어 두면 미리 걸러집니다. 없는 글처럼 DB를 봐야 아는 건 서비스에서 예외를 던집니다. 컨트롤러에는 try-catch가 없고, 예외는 @RestControllerAdvice 한 곳에서 에러 응답으로 바뀝니다. 다만 Spring Security 필터에서 난 에러는 여기서 안 잡혀서 따로 처리합니다.</a:t>
             </a:r>
             <a:endParaRPr lang="en-US" dirty="0"/>
           </a:p>
@@ -2025,7 +2025,7 @@
           <a:p>
             <a:r>
               <a:rPr lang="en-US" dirty="0"/>
-              <a:t>예제 프로젝트의 실제 코드입니다. 에러 코드는 enum 하나에 상태 코드와 제목을 같이 묶어 둡니다. 새 에러가 생기면 여기에 한 줄 추가하고, 서비스는 throw 한 줄로 끝납니다. 처리기는 예외 종류마다 어떤 응답을 만들지 적어 둔 곳이라, 에러 형식이 한 곳에서만 정해집니다. 화면에서 이미 검사했더라도 서버 검증은 생략하지 않습니다. curl이나 Postman으로 화면 없이 호출할 수 있기 때문입니다.</a:t>
+              <a:t>예제 프로젝트의 실제 코드입니다. 왼쪽 위는 DTO의 검증 규칙이고, 그 아래는 에러 코드 목록입니다. enum 하나에 에러 이름, 상태 코드, 메시지를 같이 적어 두고, 서비스에서는 throw 한 줄이면 됩니다. 오른쪽은 예외를 응답으로 바꾸는 처리기입니다. 에러 응답을 만드는 곳이 여기 하나뿐이라서, 모든 API의 에러 모양이 같아집니다.</a:t>
             </a:r>
             <a:endParaRPr lang="en-US" dirty="0"/>
           </a:p>
@@ -2201,7 +2201,7 @@
           <a:p>
             <a:r>
               <a:rPr lang="en-US" dirty="0"/>
-              <a:t>목록 조건은 전부 쿼리로 받습니다. 필터는 필드 이름 그대로, 검색어는 keyword로, 정렬은 필드와 방향을 받습니다. 정렬은 여러 개를 받게 하고 마지막에 id를 붙여서, 같은 시각에 쓴 글이 페이지마다 순서가 바뀌지 않게 합니다. page는 Spring 기본이 0부터라 문서에 꼭 적습니다. 그리고 서버는 size 최댓값과 정렬할 수 있는 필드를 정해 둡니다. 인덱스 없는 컬럼 정렬이나 size 백만 같은 요청 하나로 DB가 멈출 수 있기 때문입니다.</a:t>
+              <a:t>목록 조건은 전부 쿼리로 받습니다. 위의 주소는 여행 주제에서 제주가 들어간 글을 최신순으로 20개 달라는 요청입니다. 정렬 마지막에는 id를 붙입니다. 같은 시각에 쓴 글이 있으면 순서가 바뀔 수 있어서, id로 고정하는 겁니다. 그리고 서버가 한도를 정해 둡니다. 가져올 개수와 정렬할 필드를 제한하지 않으면, size를 백만으로 보내는 요청 하나에 DB가 멈출 수 있습니다.</a:t>
             </a:r>
             <a:endParaRPr lang="en-US" dirty="0"/>
           </a:p>
@@ -2289,7 +2289,7 @@
           <a:p>
             <a:r>
               <a:rPr lang="en-US" dirty="0"/>
-              <a:t>REST는 HTTP를 이렇게 쓰자는 설계 스타일입니다. 자원은 URL로, 행동은 메서드로, 결과는 상태 코드로 표현합니다. 이 한 줄만 봐도 42번 글을 지웠고 성공했다는 걸 알 수 있습니다. 다만 REST는 표준 규격이 아니라서 세부 규칙은 팀이 정해야 하고, 오늘 이야기는 그 규칙들입니다.</a:t>
+              <a:t>REST는 HTTP를 이렇게 쓰자는 설계 방식입니다. 무엇을 다루는지는 URL로, 무엇을 하는지는 메서드로, 결과는 상태 코드로 말합니다. 위의 한 줄만 읽어도 42번 글을 지웠고 성공했다는 걸 알 수 있습니다. 다만 REST는 정해진 표준이 아니라서, 자세한 규칙은 팀이 정해야 합니다. 오늘은 그 규칙들을 보겠습니다.</a:t>
             </a:r>
             <a:endParaRPr lang="en-US" dirty="0"/>
           </a:p>
@@ -2377,7 +2377,7 @@
           <a:p>
             <a:r>
               <a:rPr lang="en-US" dirty="0"/>
-              <a:t>응답에는 목록과 함께 페이지 정보를 줘야 화면이 쪽 번호를 그립니다. 결과가 없으면 404가 아니라 200과 빈 배열입니다. 전체 개수는 공짜가 아닙니다. 이를 위해 count 쿼리가 한 번 더 나가니, 쪽 번호가 필요 없는 무한 스크롤이라면 다음 페이지가 있는지만 알려 주는 게 더 가볍습니다. 직접 재 보니 같은 데이터에서 20개를 가져오는 건 0.01ms였는데, 전체 개수를 세는 COUNT는 48ms가 걸렸습니다.</a:t>
+              <a:t>응답에는 목록과 함께 페이지 정보를 줍니다. 전체 개수를 알아야 쪽 번호를 그릴 수 있으니까요. 결과가 없으면 404가 아니라 200과 빈 배열입니다. 그런데 전체 개수를 세려면 쿼리가 한 번 더 나갑니다. 그래서 무한 스크롤처럼 쪽 번호가 필요 없으면, 다음 페이지가 있는지만 알려 주는 게 가볍습니다. 직접 재 보니, 글 20개를 가져오는 데는 0.01ms였는데 전체 개수를 세는 데는 48ms가 걸렸습니다.</a:t>
             </a:r>
             <a:endParaRPr lang="en-US" dirty="0"/>
           </a:p>
@@ -2465,7 +2465,7 @@
           <a:p>
             <a:r>
               <a:rPr lang="en-US" dirty="0"/>
-              <a:t>페이징 방식은 두 가지입니다. 오프셋은 쪽 번호로 바로 이동할 수 있어 게시판에 맞지만, 뒤 페이지일수록 앞의 행을 읽고 버리는 비용이 커지고, 그 사이 글이 추가되면 중복이나 누락이 생깁니다. 커서는 마지막으로 본 id 다음부터 인덱스로 바로 찾아서 속도가 일정하고 중복도 없지만, 42쪽으로 바로 가는 건 못 합니다. 그래서 쪽 번호가 보이는 게시판은 오프셋, 피드나 무한 스크롤은 커서를 씁니다.</a:t>
+              <a:t>페이징 방법은 두 가지입니다. 오프셋은 앞에서 몇 개를 건너뛰고 가져옵니다. 원하는 쪽으로 바로 갈 수 있어서 게시판에 맞지만, 뒤쪽일수록 앞의 데이터를 읽고 버려야 해서 느려집니다. 커서는 마지막으로 본 글 번호 다음부터 가져옵니다. 어느 위치든 빠르지만, 42쪽으로 바로 가는 건 못 합니다. 그래서 게시판은 오프셋, 피드나 무한 스크롤은 커서를 씁니다.</a:t>
             </a:r>
             <a:endParaRPr lang="en-US" dirty="0"/>
           </a:p>
@@ -2553,7 +2553,7 @@
           <a:p>
             <a:r>
               <a:rPr lang="en-US" dirty="0"/>
-              <a:t>실제로 재 봤습니다. SQLite에 글 100만 개를 넣고 20개씩 가져왔더니, 오프셋은 1쪽에서 0.02ms였던 게 5만 쪽에서는 55ms로 늘었습니다. 앞의 행을 전부 읽고 버리기 때문입니다. 커서는 어느 위치든 거의 0에 가까운 시간으로 일정했습니다. 숫자는 환경마다 다르지만, 뒤로 갈수록 오프셋만 느려진다는 경향은 같습니다.</a:t>
+              <a:t>실제로 재 봤습니다. SQLite에 글 100만 개를 넣고 20개씩 가져왔습니다. 오프셋은 1쪽에서 0.02ms였는데, 5만 쪽에서는 55ms로 늘었습니다. 앞의 데이터를 전부 읽고 버리기 때문입니다. 커서는 어느 위치에서나 거의 0에 가깝게 일정했습니다. 숫자는 환경마다 다르지만, 뒤로 갈수록 오프셋만 느려진다는 건 같습니다.</a:t>
             </a:r>
             <a:endParaRPr lang="en-US" dirty="0"/>
           </a:p>
@@ -2729,7 +2729,7 @@
           <a:p>
             <a:r>
               <a:rPr lang="en-US" dirty="0"/>
-              <a:t>문서는 손으로 쓰면 코드와 금방 어긋나서 코드에서 만듭니다. Swagger는 springdoc 의존성만 넣으면 컨트롤러를 읽어 자동으로 만들고 화면에서 바로 호출해 볼 수 있지만, 설명을 붙이려면 운영 코드에 어노테이션이 늘어납니다. REST Docs는 테스트가 통과해야 문서가 생겨서 실제 동작과 어긋나지 않지만, API마다 테스트를 써야 합니다. 그래서 REST Docs 테스트로 OpenAPI 명세를 만들고 Swagger UI로 보여 주는 혼합 방식도 많이 씁니다.</a:t>
+              <a:t>문서를 손으로 쓰면 코드가 바뀔 때 금방 안 맞게 됩니다. 그래서 코드에서 만듭니다. Swagger는 라이브러리만 추가하면 문서를 자동으로 만들고, 화면에서 API를 바로 호출해 볼 수 있습니다. 대신 설명을 붙이려면 컨트롤러에 어노테이션이 늘어납니다. REST Docs는 테스트가 통과해야 문서가 만들어져서 실제 동작과 어긋나지 않지만, API마다 테스트를 써야 합니다. 그래서 둘을 섞어 쓰기도 합니다.</a:t>
             </a:r>
             <a:endParaRPr lang="en-US" dirty="0"/>
           </a:p>
@@ -2817,7 +2817,7 @@
           <a:p>
             <a:r>
               <a:rPr lang="en-US" dirty="0"/>
-              <a:t>제 프로젝트 글결의 문서입니다. Swagger에서 API가 로그인, 블로그, 글처럼 묶음별로 보이고, 메서드가 색으로 구분됩니다.</a:t>
+              <a:t>제 프로젝트 글결의 Swagger 화면입니다. API가 로그인, 블로그, 글처럼 기능별로 묶여 있고, 메서드마다 색이 달라서 한눈에 구분됩니다.</a:t>
             </a:r>
             <a:endParaRPr lang="en-US" dirty="0"/>
           </a:p>
@@ -2905,7 +2905,7 @@
           <a:p>
             <a:r>
               <a:rPr lang="en-US" dirty="0"/>
-              <a:t>하나를 펼치면 필요한 CSRF 머리글, 요청 바디 예시, 응답 코드별 예시가 나옵니다. 성공하면 201, 제목을 비우면 400입니다. Try it out으로 바로 호출해 볼 수 있습니다.</a:t>
+              <a:t>API 하나를 펼친 모습입니다. 보내야 하는 CSRF 헤더, 요청 바디 예시, 응답 코드별 예시가 나옵니다. 성공하면 201, 제목을 비우면 400입니다. Try it out 버튼을 누르면 여기서 바로 호출해 볼 수 있습니다.</a:t>
             </a:r>
             <a:endParaRPr lang="en-US" dirty="0"/>
           </a:p>
@@ -2993,7 +2993,7 @@
           <a:p>
             <a:r>
               <a:rPr lang="en-US" dirty="0"/>
-              <a:t>REST Docs 쪽은 테스트가 실제로 보내고 받은 요청과 응답으로 만든 문서입니다. 응답에 문서에 없는 칸이 생기거나 적은 칸이 사라지면 테스트가 실패해서, 문서가 코드와 어긋나지 않습니다. 전체 목록은 Swagger로, 주요 흐름은 예시와 함께 REST Docs로 나눴습니다.</a:t>
+              <a:t>다음은 REST Docs입니다. 테스트가 실제로 주고받은 요청과 응답으로 만든 문서입니다. 응답 칸이 문서와 다르면 테스트가 실패해서, 문서가 코드와 어긋날 수 없습니다. 글결은 전체 목록은 Swagger로, 중요한 흐름은 REST Docs로 나눠서 정리했습니다.</a:t>
             </a:r>
             <a:endParaRPr lang="en-US" dirty="0"/>
           </a:p>
@@ -3081,7 +3081,7 @@
           <a:p>
             <a:r>
               <a:rPr lang="en-US" dirty="0"/>
-              <a:t>글결의 에러 응답입니다. 글결은 표준 필드 대신 code, message, fieldErrors 세 칸으로 팀 형식을 정했습니다. 형식은 앞의 예제와 다르지만, 모든 API가 같은 모양이라는 원칙은 같습니다. 입력값 오류면 fieldErrors에 칸마다 까닭이 와서 제목 칸 옆에 바로 문구를 띄우고, 404도 같은 모양으로 답합니다.</a:t>
+              <a:t>마지막으로 글결의 에러 응답입니다. 글결은 code, message, fieldErrors 세 칸으로 팀 형식을 정했습니다. 앞의 예제와 모양은 다르지만, 모든 API가 같은 모양이라는 원칙은 같습니다. 입력값이 틀리면 fieldErrors에 칸마다 이유가 와서, 제목 칸 옆에 바로 안내 문구를 띄울 수 있습니다.</a:t>
             </a:r>
             <a:endParaRPr lang="en-US" dirty="0"/>
           </a:p>
@@ -3169,7 +3169,7 @@
           <a:p>
             <a:r>
               <a:rPr lang="en-US" dirty="0"/>
-              <a:t>정리하겠습니다. URL은 자원만, 행동은 메서드로 표현하고, 메서드는 안전성과 멱등성으로 고릅니다. 실패는 상태 코드로 알리고, 에러는 한 모양으로 보내되 내부 정보는 로그에만 남깁니다. 검증과 예외 처리는 한 곳에 모으고, 목록은 쿼리로 받되 서버가 한도를 정합니다. 그리고 이 규칙들은 코드에서 만든 문서로 공개합니다. 감사합니다.</a:t>
+              <a:t>정리하겠습니다. URL은 자원, 메서드는 행동이고, 메서드는 안전과 멱등을 보고 고릅니다. 실패는 상태 코드로 알리고, 에러는 한 모양으로 보내되 내부 정보는 로그에만 남깁니다. 검증과 예외 처리는 한 곳에 모으고, 목록 조건은 쿼리로 받되 한도는 서버가 정합니다. 그리고 이 규칙들은 코드에서 만든 문서로 공유합니다. 감사합니다.</a:t>
             </a:r>
             <a:endParaRPr lang="en-US" dirty="0"/>
           </a:p>
@@ -3345,7 +3345,7 @@
           <a:p>
             <a:r>
               <a:rPr lang="en-US" dirty="0"/>
-              <a:t>성공 응답을 감쌀지는 팀마다 갈립니다. 감싸면 프론트엔드가 응답을 꺼내는 코드가 하나로 통일되고 메타 정보를 넣기 쉽습니다. 대신 success 필드는 상태 코드와 같은 정보를 두 번 보내는 셈이라, 이걸로 분기하다 보면 앞의 200 안티패턴으로 가기 쉽습니다. 어느 쪽이든 목록은 페이지 정보와 함께 감싸고, 필드는 camelCase, 시각은 ISO 8601로 맞춥니다.</a:t>
+              <a:t>성공 응답을 success와 data로 감쌀지는 팀마다 다릅니다. 감싸면 프론트엔드에서 응답을 꺼내는 코드를 하나로 맞출 수 있고, 부가 정보를 넣기도 쉽습니다. 대신 success 필드는 상태 코드와 같은 정보를 한 번 더 보내는 셈입니다. 이걸로 분기하기 시작하면 앞에서 본 실패도 200으로 보내는 실수로 가기 쉽습니다. 어느 쪽이든 목록은 페이지 정보와 함께 감싸고, 필드 이름은 camelCase, 시각은 ISO 8601 형식으로 맞춥니다.</a:t>
             </a:r>
             <a:endParaRPr lang="en-US" dirty="0"/>
           </a:p>
@@ -3433,7 +3433,7 @@
           <a:p>
             <a:r>
               <a:rPr lang="en-US" dirty="0"/>
-              <a:t>버전은 응답 구조를 깨는 변경이 필요할 때 예전 클라이언트를 지키려고 붙입니다. 칸을 더하는 건 예전 클라이언트가 모르는 칸을 무시하니 v1 그대로 두고, 칸을 빼거나 이름이나 타입을 바꿀 때만 v2를 엽니다. v1과 v2를 한동안 같이 운영하다가, v1 요청이 거의 없어지면 닫습니다. 웹만 쓰면 서버와 화면을 같이 배포하면 되지만, 앱이나 외부 서비스가 쓰면 꼭 필요합니다.</a:t>
+              <a:t>버전은 응답 모양을 크게 바꿔야 할 때, 예전 클라이언트가 깨지지 않게 하려고 붙입니다. 칸을 새로 추가하는 건 괜찮습니다. 예전 클라이언트는 모르는 칸을 그냥 무시하니까요. 그래서 v1 그대로 둡니다. 칸을 빼거나 이름이나 타입을 바꿀 때만 v2를 만듭니다. 한동안 v1과 v2를 같이 운영하다가, v1 요청이 거의 없어지면 닫습니다. 웹만 있다면 서버와 화면을 같이 배포하면 되지만, 앱이나 외부 서비스가 쓰면 꼭 필요합니다.</a:t>
             </a:r>
             <a:endParaRPr lang="en-US" dirty="0"/>
           </a:p>
@@ -3521,7 +3521,7 @@
           <a:p>
             <a:r>
               <a:rPr lang="en-US" dirty="0"/>
-              <a:t>글결은 400, 401, 403, 404, 409, 429를 씁니다. 남의 비공개 글은 403이 아니라 404로 답해서, 그 글이 있다는 사실도 드러나지 않게 했습니다.</a:t>
+              <a:t>글결은 400, 401, 403, 404, 409, 429를 씁니다. 남의 비공개 글은 403이 아니라 404로 답합니다. 그래야 그 글이 있다는 사실조차 드러나지 않습니다.</a:t>
             </a:r>
             <a:endParaRPr lang="en-US" dirty="0"/>
           </a:p>
@@ -3609,7 +3609,7 @@
           <a:p>
             <a:r>
               <a:rPr lang="en-US" dirty="0"/>
-              <a:t>댓글 쓰기 하나에 요청 머리글, 주소 안의 값, 요청 본문 칸, 실제 요청, 실제 응답, 응답 칸이 차례로 적혀 있습니다. 모두 테스트가 실제로 주고받은 값입니다.</a:t>
+              <a:t>댓글 쓰기 API 하나가 적힌 모습입니다. 요청 헤더, 주소 안의 값, 요청 바디, 실제 요청, 실제 응답, 응답 칸 설명이 차례로 나옵니다. 모두 테스트가 실제로 주고받은 값입니다.</a:t>
             </a:r>
             <a:endParaRPr lang="en-US" dirty="0"/>
           </a:p>
@@ -3697,7 +3697,7 @@
           <a:p>
             <a:r>
               <a:rPr lang="en-US" dirty="0"/>
-              <a:t>MSA에서는 게이트웨이 뒤에 서비스가 여러 개 있습니다. 뒤쪽 서비스가 잘못된 응답을 주면 502, 과부하나 배포 중이면 503, 제한 시간 안에 응답이 없으면 504입니다. 그리고 다른 서비스의 에러를 그대로 넘기지 않고, 내 API의 에러 형식으로 바꿔서 돌려줍니다.</a:t>
+              <a:t>MSA에서는 게이트웨이 뒤에 여러 서비스가 있습니다. 뒤쪽 서비스가 이상한 응답을 주면 502, 서비스가 과부하이거나 배포 중이면 503, 정해진 시간 안에 응답이 없으면 504입니다. 그리고 다른 서비스의 에러를 그대로 넘기지 않고, 우리 API의 에러 형식으로 바꿔서 돌려줍니다.</a:t>
             </a:r>
             <a:endParaRPr lang="en-US" dirty="0"/>
           </a:p>
@@ -3785,7 +3785,7 @@
           <a:p>
             <a:r>
               <a:rPr lang="en-US" dirty="0"/>
-              <a:t>URL에 동사를 넣으면 기능마다 주소가 늘고, 같은 권한 검사를 주소마다 걸어야 해서 하나만 빠져도 구멍이 됩니다. 그래서 주소는 자원만 가리키고 행동은 메서드에 맡깁니다. 특히 GET으로 삭제하면 안 됩니다. 크롤러나 메신저의 링크 미리보기는 GET을 마음대로 보내서, 링크를 공유만 해도 글이 지워질 수 있습니다. 컬렉션은 복수형으로 통일하고, URL 경로는 대소문자를 구분해서 한 글자만 틀려도 404가 나니 전부 소문자로 쓰고 단어는 하이픈으로 나눕니다.</a:t>
+              <a:t>왼쪽처럼 URL에 동사를 넣으면 기능마다 주소가 늘어납니다. 그러면 권한 검사도 주소마다 걸어야 하고, 하나만 빠져도 보안 구멍이 됩니다. 그래서 주소에는 명사만 쓰고, 할 일은 메서드로 정합니다. 특히 GET으로 삭제하면 안 됩니다. 메신저의 링크 미리보기 같은 기능이 GET을 알아서 보내서, 링크를 공유만 해도 글이 지워질 수 있습니다. 그리고 주소는 대소문자를 구분해서 한 글자만 틀려도 404가 나니, 전부 소문자로 씁니다.</a:t>
             </a:r>
             <a:endParaRPr lang="en-US" dirty="0"/>
           </a:p>
@@ -3873,7 +3873,7 @@
           <a:p>
             <a:r>
               <a:rPr lang="en-US" dirty="0"/>
-              <a:t>관계는 경로 계층으로 표현하되, 자원 두 개 정도까지만 둡니다. 더 깊어지면 앞의 id를 전부 알아야 부를 수 있고, 서버도 단계마다 짝이 맞는지 검사해야 합니다. 댓글처럼 id 하나로 찾을 수 있는 자원은 /comments/7처럼 최상위로 끊는 게 흔한 선택입니다. 어떤 자원인지는 경로에, 검색어나 정렬, 쪽 번호처럼 보여 주는 방식은 쿼리에 둡니다.</a:t>
+              <a:t>글과 댓글처럼 관계가 있으면 경로로 표현합니다. 42번 글의 댓글은 /posts/42/comments입니다. 다만 자원 두 개까지만 잇는 게 좋습니다. 아래처럼 길어지면 댓글 하나를 부르려고 회원 번호와 글 번호까지 다 알아야 합니다. 댓글 번호만으로 찾을 수 있다면 /comments/7처럼 짧게 끊으면 됩니다. 그리고 검색어, 정렬, 쪽 번호처럼 어떻게 보여 줄지는 물음표 뒤 쿼리에 씁니다.</a:t>
             </a:r>
             <a:endParaRPr lang="en-US" dirty="0"/>
           </a:p>
@@ -3961,7 +3961,7 @@
           <a:p>
             <a:r>
               <a:rPr lang="en-US" dirty="0"/>
-              <a:t>실무에서는 CRUD로 안 떨어지는 행위가 꼭 나옵니다. 주문 취소를 예로 들면 세 가지 방법이 있습니다. 상태 값만 바꾸는 PATCH는 단순하지만, 취소에 환불이나 재고 복구가 따라오면 그 일이 요청에 드러나지 않고, 권한도 일반 수정과 나누기 어렵습니다. 그래서 부수 작업이 있는 행위는 POST로 cancel을 붙이거나, 취소 자체를 자원으로 만들어 이력을 남깁니다. 동사를 무조건 막는 게 목적이 아니라, 의도가 드러나게 하는 게 목적입니다.</a:t>
+              <a:t>실무에서는 조회, 생성, 수정, 삭제로 딱 나뉘지 않는 기능이 꼭 나옵니다. 주문 취소를 예로 들면 방법이 세 가지입니다. 첫 번째처럼 PATCH로 상태만 바꾸면 간단합니다. 하지만 취소하면 환불과 재고 복구도 같이 일어나는데, 요청만 봐서는 그게 보이지 않습니다. 그래서 이렇게 따라오는 작업이 있으면, 두 번째처럼 cancel을 붙이거나 세 번째처럼 취소를 자원으로 만듭니다. 동사를 무조건 막자는 게 아니라, 무슨 일이 일어나는지 보이게 하자는 겁니다.</a:t>
             </a:r>
             <a:endParaRPr lang="en-US" dirty="0"/>
           </a:p>
@@ -4137,7 +4137,7 @@
           <a:p>
             <a:r>
               <a:rPr lang="en-US" dirty="0"/>
-              <a:t>메서드를 고르는 기준은 두 가지입니다. 안전은 서버 상태를 바꾸지 않는다는 뜻이라, GET은 캐시나 프리페치가 마음대로 불러도 됩니다. 멱등은 여러 번 보내도 결과가 같다는 뜻이라, 타임아웃이 났을 때 그냥 다시 보내도 되는지 판단하는 기준이 됩니다. PUT은 자원 전체를 교체해서 안 보낸 칸이 비워질 수 있으니 일부 수정에는 PATCH를 씁니다. PATCH는 값을 바꾸면 멱등이지만, 조회수 1 증가처럼 연산을 보내면 멱등이 아니라서 세모입니다.</a:t>
+              <a:t>메서드를 고를 때는 두 가지를 봅니다. 첫째는 안전입니다. 서버의 데이터를 바꾸지 않는다는 뜻이고, 그래서 GET은 캐시가 저장하거나 미리 불러와도 괜찮습니다. 둘째는 멱등입니다. 같은 요청을 여러 번 보내도 결과가 같다는 뜻이고, 그래서 응답이 안 오면 그냥 다시 보내도 됩니다. PATCH가 세모인 이유는, 제목을 바꾸는 요청은 몇 번 보내도 같지만 조회수를 1 올리는 요청은 보낼 때마다 결과가 달라지기 때문입니다.</a:t>
             </a:r>
             <a:endParaRPr lang="en-US" dirty="0"/>
           </a:p>
@@ -4225,7 +4225,7 @@
           <a:p>
             <a:r>
               <a:rPr lang="en-US" dirty="0"/>
-              <a:t>POST는 멱등이 아니라서 버튼을 두 번 누르거나 네트워크가 다시 보내면 두 번 처리됩니다. 버튼 비활성화는 화면 하나만 막을 뿐이라, 결제처럼 중요한 요청은 서버에서 막습니다. 클라이언트가 요청마다 고유한 키를 만들어 보내고, 서버는 같은 키가 다시 오면 처리하지 않고 저장해 둔 결과를 돌려줍니다. 제 프로젝트에서도 글쓰기 화면을 열 때 키를 만들어서 같은 글이 두 번 생기지 않게 했습니다.</a:t>
+              <a:t>POST는 멱등이 아닙니다. 그래서 버튼을 두 번 누르거나 네트워크가 다시 보내면 결제가 두 번 될 수 있습니다. 버튼 비활성화로는 새로고침이나 다른 탭까지 막지 못해서, 중요한 요청은 서버에서 막습니다. 클라이언트가 요청마다 고유한 키를 보내고, 서버는 같은 키가 또 오면 다시 처리하지 않고 저장해 둔 결과를 돌려줍니다. 제 프로젝트에서도 이 방법으로 같은 글이 두 번 올라가지 않게 했습니다.</a:t>
             </a:r>
             <a:endParaRPr lang="en-US" dirty="0"/>
           </a:p>
@@ -17464,7 +17464,7 @@
       </p:sp>
       <p:pic>
         <p:nvPicPr>
-          <p:cNvPr id="5" name="screenshot" descr="/tmp/slide-img-1960-qgznrbqqbh.png">    </p:cNvPr>
+          <p:cNvPr id="5" name="screenshot" descr="/tmp/slide-img-390-7udvxod1rn.png">    </p:cNvPr>
           <p:cNvPicPr>
             <a:picLocks noChangeAspect="1"/>
           </p:cNvPicPr>
@@ -17656,7 +17656,7 @@
       </p:sp>
       <p:pic>
         <p:nvPicPr>
-          <p:cNvPr id="5" name="screenshot" descr="/tmp/slide-img-1960-s8ho2z142io.png">    </p:cNvPr>
+          <p:cNvPr id="5" name="screenshot" descr="/tmp/slide-img-390-p01mwkxla0r.png">    </p:cNvPr>
           <p:cNvPicPr>
             <a:picLocks noChangeAspect="1"/>
           </p:cNvPicPr>
@@ -17702,7 +17702,7 @@
       </p:sp>
       <p:pic>
         <p:nvPicPr>
-          <p:cNvPr id="7" name="screenshot" descr="/tmp/slide-img-1960-db8kck0kq3l.png">    </p:cNvPr>
+          <p:cNvPr id="7" name="screenshot" descr="/tmp/slide-img-390-7zqkjl1fnhk.png">    </p:cNvPr>
           <p:cNvPicPr>
             <a:picLocks noChangeAspect="1"/>
           </p:cNvPicPr>
@@ -17894,7 +17894,7 @@
       </p:sp>
       <p:pic>
         <p:nvPicPr>
-          <p:cNvPr id="5" name="screenshot" descr="/tmp/slide-img-1960-xkgujo5iugd.png">    </p:cNvPr>
+          <p:cNvPr id="5" name="screenshot" descr="/tmp/slide-img-390-he3we1ci1yd.png">    </p:cNvPr>
           <p:cNvPicPr>
             <a:picLocks noChangeAspect="1"/>
           </p:cNvPicPr>
@@ -18086,7 +18086,7 @@
       </p:sp>
       <p:pic>
         <p:nvPicPr>
-          <p:cNvPr id="5" name="screenshot" descr="/tmp/slide-img-1960-o20w43xsgqd.png">    </p:cNvPr>
+          <p:cNvPr id="5" name="screenshot" descr="/tmp/slide-img-390-ze8zcmyux4.png">    </p:cNvPr>
           <p:cNvPicPr>
             <a:picLocks noChangeAspect="1"/>
           </p:cNvPicPr>
@@ -20664,7 +20664,7 @@
       </p:sp>
       <p:pic>
         <p:nvPicPr>
-          <p:cNvPr id="5" name="screenshot" descr="/tmp/slide-img-1960-y5t4znpolt.png">    </p:cNvPr>
+          <p:cNvPr id="5" name="screenshot" descr="/tmp/slide-img-390-omi49hu4be.png">    </p:cNvPr>
           <p:cNvPicPr>
             <a:picLocks noChangeAspect="1"/>
           </p:cNvPicPr>
@@ -20856,7 +20856,7 @@
       </p:sp>
       <p:pic>
         <p:nvPicPr>
-          <p:cNvPr id="5" name="screenshot" descr="/tmp/slide-img-1960-5263ksiftps.png">    </p:cNvPr>
+          <p:cNvPr id="5" name="screenshot" descr="/tmp/slide-img-390-dlwojwvsgpj.png">    </p:cNvPr>
           <p:cNvPicPr>
             <a:picLocks noChangeAspect="1"/>
           </p:cNvPicPr>
@@ -20902,7 +20902,7 @@
       </p:sp>
       <p:pic>
         <p:nvPicPr>
-          <p:cNvPr id="7" name="screenshot" descr="/tmp/slide-img-1960-pr0yqohz1oo.png">    </p:cNvPr>
+          <p:cNvPr id="7" name="screenshot" descr="/tmp/slide-img-390-9awwv4ipaxr.png">    </p:cNvPr>
           <p:cNvPicPr>
             <a:picLocks noChangeAspect="1"/>
           </p:cNvPicPr>
@@ -20948,7 +20948,7 @@
       </p:sp>
       <p:pic>
         <p:nvPicPr>
-          <p:cNvPr id="9" name="screenshot" descr="/tmp/slide-img-1960-x58xi59jgpg.png">    </p:cNvPr>
+          <p:cNvPr id="9" name="screenshot" descr="/tmp/slide-img-390-3jqw6f0es42.png">    </p:cNvPr>
           <p:cNvPicPr>
             <a:picLocks noChangeAspect="1"/>
           </p:cNvPicPr>

--- a/발표/RESTful-API-설계.pptx
+++ b/발표/RESTful-API-설계.pptx
@@ -140,7 +140,7 @@
   <p:extLst>
     <p:ext uri="{521415D9-36F7-43E2-AB2F-B90AF26B5E84}">
       <p14:sectionLst xmlns:p14="http://schemas.microsoft.com/office/powerpoint/2010/main">
-        <p14:section name="시작" id="{234d0fd2-0b7c-49ba-ea6b-5c32903fbae9}">
+        <p14:section name="시작" id="{a69b3c41-a3e8-9a06-0a3b-0e7f56eee222}">
           <p14:sldIdLst>
             <p14:sldId id="256"/>
             <p14:sldId id="257"/>
@@ -149,32 +149,32 @@
             <p14:sldId id="260"/>
           </p14:sldIdLst>
         </p14:section>
-        <p14:section name="01 자원 중심 URL" id="{de70756d-a4d4-57b9-22d2-4448ef69a3a8}">
+        <p14:section name="01 자원 중심 URL" id="{df121def-56c8-e578-ac3d-5131ce9b8df4}">
           <p14:sldIdLst>
             <p14:sldId id="261"/>
             <p14:sldId id="262"/>
             <p14:sldId id="263"/>
           </p14:sldIdLst>
         </p14:section>
-        <p14:section name="02 HTTP 메서드와 상태 코드" id="{a26333ea-e879-14a2-4547-833e97d21c62}">
+        <p14:section name="02 HTTP 메서드와 상태 코드" id="{57725d79-5026-43d5-bd4b-2f9007c5b9a0}">
           <p14:sldIdLst>
             <p14:sldId id="264"/>
             <p14:sldId id="265"/>
             <p14:sldId id="266"/>
           </p14:sldIdLst>
         </p14:section>
-        <p14:section name="03 공통 응답과 에러 형식" id="{e90af2fb-240a-536e-a530-4734aec67399}">
+        <p14:section name="03 공통 응답과 에러 형식" id="{d4a309c2-9997-45f5-7b4b-053bc7c70e3a}">
           <p14:sldIdLst>
             <p14:sldId id="267"/>
           </p14:sldIdLst>
         </p14:section>
-        <p14:section name="04 전역 예외 처리와 입력 검증" id="{0fe933b6-4795-7c18-e362-c263e4df7695}">
+        <p14:section name="04 전역 예외 처리와 입력 검증" id="{821d7c47-8639-5af4-565e-df4936579e34}">
           <p14:sldIdLst>
             <p14:sldId id="268"/>
             <p14:sldId id="269"/>
           </p14:sldIdLst>
         </p14:section>
-        <p14:section name="05 페이징 · 검색 · 정렬" id="{44fdf30f-3c0c-7a88-ae3b-a95aef5fab94}">
+        <p14:section name="05 페이징 · 검색 · 정렬" id="{fe4cd253-1ae4-4292-e9df-013835cc86b1}">
           <p14:sldIdLst>
             <p14:sldId id="270"/>
             <p14:sldId id="271"/>
@@ -183,7 +183,7 @@
             <p14:sldId id="274"/>
           </p14:sldIdLst>
         </p14:section>
-        <p14:section name="06 API 문서" id="{8a86525a-a2c6-aac5-1379-48ef24590a06}">
+        <p14:section name="06 API 문서" id="{34373cc7-84da-0781-cf56-6d3fa8fec063}">
           <p14:sldIdLst>
             <p14:sldId id="275"/>
             <p14:sldId id="276"/>
@@ -191,12 +191,12 @@
             <p14:sldId id="278"/>
           </p14:sldIdLst>
         </p14:section>
-        <p14:section name="정리" id="{731ce9b9-4a76-be1e-9932-bf831d383a5a}">
+        <p14:section name="정리" id="{e13b9443-642b-1ad9-ca30-ab34a983b838}">
           <p14:sldIdLst>
             <p14:sldId id="279"/>
           </p14:sldIdLst>
         </p14:section>
-        <p14:section name="예비 (질문이 나오면)" id="{18462acd-30a4-58a3-37fb-614cbecc2241}">
+        <p14:section name="예비 (질문이 나오면)" id="{b0434beb-412f-5efc-ba0e-47bd0c9b4bc2}">
           <p14:sldIdLst>
             <p14:sldId id="280"/>
             <p14:sldId id="281"/>
@@ -14307,11 +14307,11 @@
         <p:spPr>
           <a:xfrm>
             <a:off x="649224" y="2153412"/>
-            <a:ext cx="5330952" cy="2080895"/>
+            <a:ext cx="5330952" cy="1922145"/>
           </a:xfrm>
           <a:prstGeom prst="roundRect">
             <a:avLst>
-              <a:gd name="adj" fmla="val 5273"/>
+              <a:gd name="adj" fmla="val 5709"/>
             </a:avLst>
           </a:prstGeom>
           <a:solidFill>
@@ -14431,7 +14431,7 @@
         <p:spPr>
           <a:xfrm>
             <a:off x="905256" y="2592324"/>
-            <a:ext cx="4873752" cy="1532255"/>
+            <a:ext cx="4873752" cy="1373505"/>
           </a:xfrm>
           <a:prstGeom prst="rect">
             <a:avLst/>
@@ -14450,7 +14450,7 @@
               <a:buNone/>
             </a:pPr>
             <a:r>
-              <a:rPr lang="en-US" sz="1700" dirty="0">
+              <a:rPr lang="en-US" sz="1500" dirty="0">
                 <a:solidFill>
                   <a:srgbClr val="E5806F"/>
                 </a:solidFill>
@@ -14460,7 +14460,7 @@
               </a:rPr>
               <a:t>POST /deletePost.do?no=42</a:t>
             </a:r>
-            <a:endParaRPr lang="en-US" sz="1700" dirty="0"/>
+            <a:endParaRPr lang="en-US" sz="1500" dirty="0"/>
           </a:p>
           <a:p>
             <a:pPr algn="l" indent="0" marL="0">
@@ -14470,7 +14470,7 @@
               <a:buNone/>
             </a:pPr>
             <a:r>
-              <a:rPr lang="en-US" sz="1700" dirty="0">
+              <a:rPr lang="en-US" sz="1500" dirty="0">
                 <a:solidFill>
                   <a:srgbClr val="E5806F"/>
                 </a:solidFill>
@@ -14480,7 +14480,7 @@
               </a:rPr>
               <a:t>GET  /post/remove?id=42</a:t>
             </a:r>
-            <a:endParaRPr lang="en-US" sz="1700" dirty="0"/>
+            <a:endParaRPr lang="en-US" sz="1500" dirty="0"/>
           </a:p>
           <a:p>
             <a:pPr algn="l" indent="0" marL="0">
@@ -14490,7 +14490,7 @@
               <a:buNone/>
             </a:pPr>
             <a:r>
-              <a:rPr lang="en-US" sz="1700" dirty="0">
+              <a:rPr lang="en-US" sz="1500" dirty="0">
                 <a:solidFill>
                   <a:srgbClr val="E5806F"/>
                 </a:solidFill>
@@ -14500,7 +14500,7 @@
               </a:rPr>
               <a:t>POST /api  {"action":"delete","id":42}</a:t>
             </a:r>
-            <a:endParaRPr lang="en-US" sz="1700" dirty="0"/>
+            <a:endParaRPr lang="en-US" sz="1500" dirty="0"/>
           </a:p>
           <a:p>
             <a:pPr algn="l" indent="0" marL="0">
@@ -14510,7 +14510,7 @@
               <a:buNone/>
             </a:pPr>
             <a:r>
-              <a:rPr lang="en-US" sz="1700" dirty="0">
+              <a:rPr lang="en-US" sz="1500" dirty="0">
                 <a:solidFill>
                   <a:srgbClr val="FAF9F5"/>
                 </a:solidFill>
@@ -14520,7 +14520,7 @@
               </a:rPr>
               <a:t> </a:t>
             </a:r>
-            <a:endParaRPr lang="en-US" sz="1700" dirty="0"/>
+            <a:endParaRPr lang="en-US" sz="1500" dirty="0"/>
           </a:p>
           <a:p>
             <a:pPr algn="l" indent="0" marL="0">
@@ -14530,7 +14530,7 @@
               <a:buNone/>
             </a:pPr>
             <a:r>
-              <a:rPr lang="en-US" sz="1700" dirty="0">
+              <a:rPr lang="en-US" sz="1500" dirty="0">
                 <a:solidFill>
                   <a:srgbClr val="A09D96"/>
                 </a:solidFill>
@@ -14540,7 +14540,7 @@
               </a:rPr>
               <a:t>→ 쓰는 쪽은 API마다 문서를 찾거나 물어봐야 한다</a:t>
             </a:r>
-            <a:endParaRPr lang="en-US" sz="1700" dirty="0"/>
+            <a:endParaRPr lang="en-US" sz="1500" dirty="0"/>
           </a:p>
         </p:txBody>
       </p:sp>
@@ -14553,11 +14553,11 @@
         <p:spPr>
           <a:xfrm>
             <a:off x="6208776" y="2153412"/>
-            <a:ext cx="5330952" cy="2080895"/>
+            <a:ext cx="5330952" cy="1922145"/>
           </a:xfrm>
           <a:prstGeom prst="roundRect">
             <a:avLst>
-              <a:gd name="adj" fmla="val 5273"/>
+              <a:gd name="adj" fmla="val 5709"/>
             </a:avLst>
           </a:prstGeom>
           <a:solidFill>
@@ -14677,7 +14677,7 @@
         <p:spPr>
           <a:xfrm>
             <a:off x="6464808" y="2592324"/>
-            <a:ext cx="4873752" cy="1532255"/>
+            <a:ext cx="4873752" cy="1373505"/>
           </a:xfrm>
           <a:prstGeom prst="rect">
             <a:avLst/>
@@ -14696,7 +14696,7 @@
               <a:buNone/>
             </a:pPr>
             <a:r>
-              <a:rPr lang="en-US" sz="1700" dirty="0">
+              <a:rPr lang="en-US" sz="1500" dirty="0">
                 <a:solidFill>
                   <a:srgbClr val="FAF9F5"/>
                 </a:solidFill>
@@ -14706,7 +14706,7 @@
               </a:rPr>
               <a:t>DELETE /api/v1/posts/42</a:t>
             </a:r>
-            <a:endParaRPr lang="en-US" sz="1700" dirty="0"/>
+            <a:endParaRPr lang="en-US" sz="1500" dirty="0"/>
           </a:p>
           <a:p>
             <a:pPr algn="l" indent="0" marL="0">
@@ -14716,7 +14716,7 @@
               <a:buNone/>
             </a:pPr>
             <a:r>
-              <a:rPr lang="en-US" sz="1700" dirty="0">
+              <a:rPr lang="en-US" sz="1500" dirty="0">
                 <a:solidFill>
                   <a:srgbClr val="5DB872"/>
                 </a:solidFill>
@@ -14726,7 +14726,7 @@
               </a:rPr>
               <a:t>→ 204 No Content</a:t>
             </a:r>
-            <a:endParaRPr lang="en-US" sz="1700" dirty="0"/>
+            <a:endParaRPr lang="en-US" sz="1500" dirty="0"/>
           </a:p>
           <a:p>
             <a:pPr algn="l" indent="0" marL="0">
@@ -14736,7 +14736,7 @@
               <a:buNone/>
             </a:pPr>
             <a:r>
-              <a:rPr lang="en-US" sz="1700" dirty="0">
+              <a:rPr lang="en-US" sz="1500" dirty="0">
                 <a:solidFill>
                   <a:srgbClr val="FAF9F5"/>
                 </a:solidFill>
@@ -14746,7 +14746,7 @@
               </a:rPr>
               <a:t> </a:t>
             </a:r>
-            <a:endParaRPr lang="en-US" sz="1700" dirty="0"/>
+            <a:endParaRPr lang="en-US" sz="1500" dirty="0"/>
           </a:p>
           <a:p>
             <a:pPr algn="l" indent="0" marL="0">
@@ -14756,7 +14756,7 @@
               <a:buNone/>
             </a:pPr>
             <a:r>
-              <a:rPr lang="en-US" sz="1700" dirty="0">
+              <a:rPr lang="en-US" sz="1500" dirty="0">
                 <a:solidFill>
                   <a:srgbClr val="FAF9F5"/>
                 </a:solidFill>
@@ -14766,7 +14766,7 @@
               </a:rPr>
               <a:t> </a:t>
             </a:r>
-            <a:endParaRPr lang="en-US" sz="1700" dirty="0"/>
+            <a:endParaRPr lang="en-US" sz="1500" dirty="0"/>
           </a:p>
           <a:p>
             <a:pPr algn="l" indent="0" marL="0">
@@ -14776,7 +14776,7 @@
               <a:buNone/>
             </a:pPr>
             <a:r>
-              <a:rPr lang="en-US" sz="1700" dirty="0">
+              <a:rPr lang="en-US" sz="1500" dirty="0">
                 <a:solidFill>
                   <a:srgbClr val="A09D96"/>
                 </a:solidFill>
@@ -14786,7 +14786,7 @@
               </a:rPr>
               <a:t>→ 주소만 보고도 무슨 일인지 알 수 있다</a:t>
             </a:r>
-            <a:endParaRPr lang="en-US" sz="1700" dirty="0"/>
+            <a:endParaRPr lang="en-US" sz="1500" dirty="0"/>
           </a:p>
         </p:txBody>
       </p:sp>
@@ -14798,7 +14798,7 @@
         </p:nvSpPr>
         <p:spPr>
           <a:xfrm>
-            <a:off x="649224" y="4462907"/>
+            <a:off x="649224" y="4304157"/>
             <a:ext cx="10890504" cy="408940"/>
           </a:xfrm>
           <a:prstGeom prst="rect">
@@ -15038,7 +15038,7 @@
       </p:sp>
       <p:pic>
         <p:nvPicPr>
-          <p:cNvPr id="6" name="screenshot" descr="/tmp/ccp-857-cv3n5hopadl.png">    </p:cNvPr>
+          <p:cNvPr id="6" name="screenshot" descr="/tmp/ccp-384-1ak2j7qu2q4.png">    </p:cNvPr>
           <p:cNvPicPr>
             <a:picLocks noChangeAspect="1"/>
           </p:cNvPicPr>
@@ -15288,7 +15288,7 @@
       </p:sp>
       <p:pic>
         <p:nvPicPr>
-          <p:cNvPr id="6" name="screenshot" descr="/tmp/ccp-857-aevilgy2rmt.png">    </p:cNvPr>
+          <p:cNvPr id="6" name="screenshot" descr="/tmp/ccp-384-j7rgb43fup9.png">    </p:cNvPr>
           <p:cNvPicPr>
             <a:picLocks noChangeAspect="1"/>
           </p:cNvPicPr>
@@ -15334,7 +15334,7 @@
       </p:sp>
       <p:pic>
         <p:nvPicPr>
-          <p:cNvPr id="8" name="screenshot" descr="/tmp/ccp-857-nvf0ktzpyki.png">    </p:cNvPr>
+          <p:cNvPr id="8" name="screenshot" descr="/tmp/ccp-384-igxtrha3u6d.png">    </p:cNvPr>
           <p:cNvPicPr>
             <a:picLocks noChangeAspect="1"/>
           </p:cNvPicPr>
@@ -15584,7 +15584,7 @@
       </p:sp>
       <p:pic>
         <p:nvPicPr>
-          <p:cNvPr id="6" name="screenshot" descr="/tmp/ccp-857-srdgh01s4ue.png">    </p:cNvPr>
+          <p:cNvPr id="6" name="screenshot" descr="/tmp/ccp-384-nb7g88h57n.png">    </p:cNvPr>
           <p:cNvPicPr>
             <a:picLocks noChangeAspect="1"/>
           </p:cNvPicPr>
@@ -15834,7 +15834,7 @@
       </p:sp>
       <p:pic>
         <p:nvPicPr>
-          <p:cNvPr id="6" name="screenshot" descr="/tmp/ccp-857-4pwn7lvxwc5.png">    </p:cNvPr>
+          <p:cNvPr id="6" name="screenshot" descr="/tmp/ccp-384-acijlp2sh1v.png">    </p:cNvPr>
           <p:cNvPicPr>
             <a:picLocks noChangeAspect="1"/>
           </p:cNvPicPr>
@@ -21521,7 +21521,7 @@
       </p:sp>
       <p:pic>
         <p:nvPicPr>
-          <p:cNvPr id="6" name="screenshot" descr="/tmp/ccp-857-3ee4an7bh1.png">    </p:cNvPr>
+          <p:cNvPr id="6" name="screenshot" descr="/tmp/ccp-384-97fadz176g.png">    </p:cNvPr>
           <p:cNvPicPr>
             <a:picLocks noChangeAspect="1"/>
           </p:cNvPicPr>
@@ -21771,7 +21771,7 @@
       </p:sp>
       <p:pic>
         <p:nvPicPr>
-          <p:cNvPr id="6" name="screenshot" descr="/tmp/ccp-857-ww80rw78j9i.png">    </p:cNvPr>
+          <p:cNvPr id="6" name="screenshot" descr="/tmp/ccp-384-fbuexd8xyhd.png">    </p:cNvPr>
           <p:cNvPicPr>
             <a:picLocks noChangeAspect="1"/>
           </p:cNvPicPr>
@@ -21817,7 +21817,7 @@
       </p:sp>
       <p:pic>
         <p:nvPicPr>
-          <p:cNvPr id="8" name="screenshot" descr="/tmp/ccp-857-j54x0xe0zme.png">    </p:cNvPr>
+          <p:cNvPr id="8" name="screenshot" descr="/tmp/ccp-384-1k88meavo1y.png">    </p:cNvPr>
           <p:cNvPicPr>
             <a:picLocks noChangeAspect="1"/>
           </p:cNvPicPr>
@@ -21863,7 +21863,7 @@
       </p:sp>
       <p:pic>
         <p:nvPicPr>
-          <p:cNvPr id="10" name="screenshot" descr="/tmp/ccp-857-23an5ciy1jy.png">    </p:cNvPr>
+          <p:cNvPr id="10" name="screenshot" descr="/tmp/ccp-384-ltxm0p15p5a.png">    </p:cNvPr>
           <p:cNvPicPr>
             <a:picLocks noChangeAspect="1"/>
           </p:cNvPicPr>
@@ -30505,11 +30505,11 @@
     </a:clrScheme>
     <a:fontScheme name="Cream Coral">
       <a:majorFont>
-        <a:latin typeface="Noto Serif KR"/>
-        <a:ea typeface="Noto Serif KR"/>
+        <a:latin typeface="Pretendard"/>
+        <a:ea typeface="Pretendard"/>
         <a:cs typeface=""/>
         <a:font script="Jpan" typeface="游ゴシック Light"/>
-        <a:font script="Hang" typeface="Noto Serif KR"/>
+        <a:font script="Hang" typeface="Pretendard"/>
         <a:font script="Hans" typeface="等线 Light"/>
         <a:font script="Hant" typeface="新細明體"/>
         <a:font script="Arab" typeface="Times New Roman"/>
@@ -30557,11 +30557,11 @@
         <a:font script="Tfng" typeface="Ebrima"/>
       </a:majorFont>
       <a:minorFont>
-        <a:latin typeface="Pretendard"/>
-        <a:ea typeface="Pretendard"/>
+        <a:latin typeface="Pretendard SemiBold"/>
+        <a:ea typeface="Pretendard SemiBold"/>
         <a:cs typeface=""/>
         <a:font script="Jpan" typeface="游ゴシック"/>
-        <a:font script="Hang" typeface="Pretendard"/>
+        <a:font script="Hang" typeface="Pretendard SemiBold"/>
         <a:font script="Hans" typeface="等线"/>
         <a:font script="Hant" typeface="新細明體"/>
         <a:font script="Arab" typeface="Arial"/>
